--- a/reports/presentation/G3_results_presentation.pptx
+++ b/reports/presentation/G3_results_presentation.pptx
@@ -6749,6 +6749,23 @@
                 <a:latin typeface="Calibri"/>
               </a:rPr>
               <a:t>8 participants have no recording; 5 were recorded more than once (6 extra takes): one take each was chosen by a label-blind complete-word rule</a:t>
+            </a:r>
+          </a:p>
+          <a:p>
+            <a:pPr algn="l" marL="594360" indent="-274320">
+              <a:spcAft>
+                <a:spcPts val="600"/>
+              </a:spcAft>
+              <a:buChar char="–"/>
+            </a:pPr>
+            <a:r>
+              <a:rPr sz="1500" b="0">
+                <a:solidFill>
+                  <a:srgbClr val="1C1C1A"/>
+                </a:solidFill>
+                <a:latin typeface="Calibri"/>
+              </a:rPr>
+              <a:t>A later delivery has trimmed 16 kHz copies for 8 of them, 4 edited or damaged: not counted until the originals are supplied</a:t>
             </a:r>
           </a:p>
           <a:p>

--- a/reports/presentation/G3_results_presentation.pptx
+++ b/reports/presentation/G3_results_presentation.pptx
@@ -863,7 +863,7 @@
           <a:lstStyle/>
           <a:p>
             <a:r>
-              <a:t>The protocol asks for at least 40 valid observations; we have 32. Nothing was imputed or invented: missing recordings and words stay missing.</a:t>
+              <a:t>The protocol asks for at least 40 valid observations; we have 40. Nothing was imputed or invented: missing recordings and words stay missing.</a:t>
             </a:r>
           </a:p>
         </p:txBody>
@@ -4401,7 +4401,7 @@
                 </a:solidFill>
                 <a:latin typeface="Calibri"/>
               </a:rPr>
-              <a:t>CS412 mini-project · Group 3 · second-year Computer Science students · results of 2026-10-03</a:t>
+              <a:t>CS412 mini-project · Group 3 · second-year Computer Science students · results of 2026-10-04</a:t>
             </a:r>
           </a:p>
         </p:txBody>
@@ -4581,7 +4581,7 @@
                 </a:solidFill>
                 <a:latin typeface="Calibri"/>
               </a:rPr>
-              <a:t>Sample: 32 participants analysed, below the protocol minimum of 40</a:t>
+              <a:t>Sample: 40 participants analysed, meeting the protocol minimum of 40</a:t>
             </a:r>
           </a:p>
           <a:p>
@@ -4598,7 +4598,7 @@
                 </a:solidFill>
                 <a:latin typeface="Calibri"/>
               </a:rPr>
-              <a:t>Power: with n = 32, only correlations of about |ρ| ≥ 0.49 are reliably detectable; a moderate ρ = 0.3 needs about 90 participants</a:t>
+              <a:t>Power: with n = 40, only correlations of about |ρ| ≥ 0.44 are reliably detectable; a moderate ρ = 0.3 needs about 90 participants</a:t>
             </a:r>
           </a:p>
           <a:p>
@@ -4615,7 +4615,7 @@
                 </a:solidFill>
                 <a:latin typeface="Calibri"/>
               </a:rPr>
-              <a:t>Recording setting: 6 files used a different setting, which shifts 20 of 108 features</a:t>
+              <a:t>Audio: trimmed copies, not the original recordings; 9 without a verified original, 3 edited or clipped</a:t>
             </a:r>
           </a:p>
           <a:p>
@@ -4632,7 +4632,24 @@
                 </a:solidFill>
                 <a:latin typeface="Calibri"/>
               </a:rPr>
-              <a:t>Noise: background voices in 27 of 32 recordings, captured in a hallway right after class</a:t>
+              <a:t>Recording setting: 5 files are copies of recordings that used a different setting, which shows no significant feature difference in this analysis</a:t>
+            </a:r>
+          </a:p>
+          <a:p>
+            <a:pPr algn="l" marL="274320" indent="-274320">
+              <a:spcAft>
+                <a:spcPts val="600"/>
+              </a:spcAft>
+              <a:buChar char="•"/>
+            </a:pPr>
+            <a:r>
+              <a:rPr sz="1900" b="0">
+                <a:solidFill>
+                  <a:srgbClr val="1C1C1A"/>
+                </a:solidFill>
+                <a:latin typeface="Calibri"/>
+              </a:rPr>
+              <a:t>Noise: background voices in 16 of 40 recordings, captured in a hallway right after class</a:t>
             </a:r>
           </a:p>
           <a:p>
@@ -5228,6 +5245,23 @@
                 </a:solidFill>
                 <a:latin typeface="Calibri"/>
               </a:rPr>
+              <a:t>Find the original recordings behind the copies without a verified original (reports/supplied_audio_audit.md)</a:t>
+            </a:r>
+          </a:p>
+          <a:p>
+            <a:pPr algn="l" marL="274320" indent="-274320">
+              <a:spcAft>
+                <a:spcPts val="600"/>
+              </a:spcAft>
+              <a:buChar char="•"/>
+            </a:pPr>
+            <a:r>
+              <a:rPr sz="2000" b="0">
+                <a:solidFill>
+                  <a:srgbClr val="1C1C1A"/>
+                </a:solidFill>
+                <a:latin typeface="Calibri"/>
+              </a:rPr>
               <a:t>Collect more participants with the checklist: audio only, one setting, quiet spot, one take</a:t>
             </a:r>
           </a:p>
@@ -6421,7 +6455,7 @@
                 </a:solidFill>
                 <a:latin typeface="Calibri"/>
               </a:rPr>
-              <a:t>32</a:t>
+              <a:t>40</a:t>
             </a:r>
           </a:p>
         </p:txBody>
@@ -6545,7 +6579,7 @@
                 </a:solidFill>
                 <a:latin typeface="Calibri"/>
               </a:rPr>
-              <a:t>32</a:t>
+              <a:t>40</a:t>
             </a:r>
           </a:p>
         </p:txBody>
@@ -6748,7 +6782,7 @@
                 </a:solidFill>
                 <a:latin typeface="Calibri"/>
               </a:rPr>
-              <a:t>8 participants have no recording; 5 were recorded more than once (6 extra takes): one take each was chosen by a label-blind complete-word rule</a:t>
+              <a:t>By the group's decision the analysis uses the CS2B_v2_wav_16k delivery: trimmed 16 kHz copies, one per participant; the original recordings are archived, not analysed</a:t>
             </a:r>
           </a:p>
           <a:p>
@@ -6765,7 +6799,7 @@
                 </a:solidFill>
                 <a:latin typeface="Calibri"/>
               </a:rPr>
-              <a:t>A later delivery has trimmed 16 kHz copies for 8 of them, 4 edited or damaged: not counted until the originals are supplied</a:t>
+              <a:t>9 files have no verified original and 3 are edited or clipped; sensitivity analyses exclude them</a:t>
             </a:r>
           </a:p>
           <a:p>
@@ -6799,7 +6833,7 @@
                 </a:solidFill>
                 <a:latin typeface="Calibri"/>
               </a:rPr>
-              <a:t>Background voices in 27 of 32 selected recordings; 6 used a different recording setting</a:t>
+              <a:t>Background voices in 16 of 40 selected recordings; 5 are copies of recordings that used a different recording setting</a:t>
             </a:r>
           </a:p>
           <a:p>
@@ -8513,7 +8547,7 @@
                 </a:solidFill>
                 <a:latin typeface="Calibri"/>
               </a:rPr>
-              <a:t>Valence and arousal move together (Spearman ρ = 0.77, n = 32)</a:t>
+              <a:t>Valence and arousal move together (Spearman ρ = 0.71, n = 39)</a:t>
             </a:r>
           </a:p>
         </p:txBody>
@@ -9067,7 +9101,7 @@
                           </a:solidFill>
                           <a:latin typeface="Calibri"/>
                         </a:rPr>
-                        <a:t>+0.11</a:t>
+                        <a:t>+0.01</a:t>
                       </a:r>
                     </a:p>
                   </a:txBody>
@@ -9089,7 +9123,7 @@
                           </a:solidFill>
                           <a:latin typeface="Calibri"/>
                         </a:rPr>
-                        <a:t>0.539</a:t>
+                        <a:t>0.945</a:t>
                       </a:r>
                     </a:p>
                   </a:txBody>
@@ -9111,7 +9145,7 @@
                           </a:solidFill>
                           <a:latin typeface="Calibri"/>
                         </a:rPr>
-                        <a:t>+0.15</a:t>
+                        <a:t>+0.01</a:t>
                       </a:r>
                     </a:p>
                   </a:txBody>
@@ -9133,7 +9167,7 @@
                           </a:solidFill>
                           <a:latin typeface="Calibri"/>
                         </a:rPr>
-                        <a:t>0.413</a:t>
+                        <a:t>0.972</a:t>
                       </a:r>
                     </a:p>
                   </a:txBody>
@@ -9179,7 +9213,7 @@
                           </a:solidFill>
                           <a:latin typeface="Calibri"/>
                         </a:rPr>
-                        <a:t>+0.13</a:t>
+                        <a:t>+0.21</a:t>
                       </a:r>
                     </a:p>
                   </a:txBody>
@@ -9201,7 +9235,7 @@
                           </a:solidFill>
                           <a:latin typeface="Calibri"/>
                         </a:rPr>
-                        <a:t>0.480</a:t>
+                        <a:t>0.198</a:t>
                       </a:r>
                     </a:p>
                   </a:txBody>
@@ -9223,7 +9257,7 @@
                           </a:solidFill>
                           <a:latin typeface="Calibri"/>
                         </a:rPr>
-                        <a:t>+0.13</a:t>
+                        <a:t>+0.08</a:t>
                       </a:r>
                     </a:p>
                   </a:txBody>
@@ -9245,7 +9279,7 @@
                           </a:solidFill>
                           <a:latin typeface="Calibri"/>
                         </a:rPr>
-                        <a:t>0.471</a:t>
+                        <a:t>0.617</a:t>
                       </a:r>
                     </a:p>
                   </a:txBody>
@@ -9291,7 +9325,7 @@
                           </a:solidFill>
                           <a:latin typeface="Calibri"/>
                         </a:rPr>
-                        <a:t>+0.34</a:t>
+                        <a:t>+0.19</a:t>
                       </a:r>
                     </a:p>
                   </a:txBody>
@@ -9313,7 +9347,7 @@
                           </a:solidFill>
                           <a:latin typeface="Calibri"/>
                         </a:rPr>
-                        <a:t>0.054</a:t>
+                        <a:t>0.237</a:t>
                       </a:r>
                     </a:p>
                   </a:txBody>
@@ -9335,7 +9369,7 @@
                           </a:solidFill>
                           <a:latin typeface="Calibri"/>
                         </a:rPr>
-                        <a:t>+0.39</a:t>
+                        <a:t>+0.26</a:t>
                       </a:r>
                     </a:p>
                   </a:txBody>
@@ -9357,7 +9391,7 @@
                           </a:solidFill>
                           <a:latin typeface="Calibri"/>
                         </a:rPr>
-                        <a:t>0.026</a:t>
+                        <a:t>0.105</a:t>
                       </a:r>
                     </a:p>
                   </a:txBody>
@@ -9403,7 +9437,7 @@
                           </a:solidFill>
                           <a:latin typeface="Calibri"/>
                         </a:rPr>
-                        <a:t>+0.09</a:t>
+                        <a:t>+0.13</a:t>
                       </a:r>
                     </a:p>
                   </a:txBody>
@@ -9425,7 +9459,7 @@
                           </a:solidFill>
                           <a:latin typeface="Calibri"/>
                         </a:rPr>
-                        <a:t>0.616</a:t>
+                        <a:t>0.436</a:t>
                       </a:r>
                     </a:p>
                   </a:txBody>
@@ -9447,7 +9481,7 @@
                           </a:solidFill>
                           <a:latin typeface="Calibri"/>
                         </a:rPr>
-                        <a:t>+0.07</a:t>
+                        <a:t>+0.10</a:t>
                       </a:r>
                     </a:p>
                   </a:txBody>
@@ -9469,7 +9503,7 @@
                           </a:solidFill>
                           <a:latin typeface="Calibri"/>
                         </a:rPr>
-                        <a:t>0.713</a:t>
+                        <a:t>0.523</a:t>
                       </a:r>
                     </a:p>
                   </a:txBody>
@@ -9515,7 +9549,7 @@
                           </a:solidFill>
                           <a:latin typeface="Calibri"/>
                         </a:rPr>
-                        <a:t>+0.25</a:t>
+                        <a:t>+0.26</a:t>
                       </a:r>
                     </a:p>
                   </a:txBody>
@@ -9537,7 +9571,7 @@
                           </a:solidFill>
                           <a:latin typeface="Calibri"/>
                         </a:rPr>
-                        <a:t>0.159</a:t>
+                        <a:t>0.115</a:t>
                       </a:r>
                     </a:p>
                   </a:txBody>
@@ -9559,7 +9593,7 @@
                           </a:solidFill>
                           <a:latin typeface="Calibri"/>
                         </a:rPr>
-                        <a:t>+0.11</a:t>
+                        <a:t>+0.14</a:t>
                       </a:r>
                     </a:p>
                   </a:txBody>
@@ -9581,7 +9615,7 @@
                           </a:solidFill>
                           <a:latin typeface="Calibri"/>
                         </a:rPr>
-                        <a:t>0.567</a:t>
+                        <a:t>0.391</a:t>
                       </a:r>
                     </a:p>
                   </a:txBody>
@@ -9627,7 +9661,7 @@
                           </a:solidFill>
                           <a:latin typeface="Calibri"/>
                         </a:rPr>
-                        <a:t>-0.08</a:t>
+                        <a:t>-0.03</a:t>
                       </a:r>
                     </a:p>
                   </a:txBody>
@@ -9649,7 +9683,7 @@
                           </a:solidFill>
                           <a:latin typeface="Calibri"/>
                         </a:rPr>
-                        <a:t>0.664</a:t>
+                        <a:t>0.859</a:t>
                       </a:r>
                     </a:p>
                   </a:txBody>
@@ -9671,7 +9705,7 @@
                           </a:solidFill>
                           <a:latin typeface="Calibri"/>
                         </a:rPr>
-                        <a:t>+0.11</a:t>
+                        <a:t>+0.03</a:t>
                       </a:r>
                     </a:p>
                   </a:txBody>
@@ -9693,7 +9727,7 @@
                           </a:solidFill>
                           <a:latin typeface="Calibri"/>
                         </a:rPr>
-                        <a:t>0.544</a:t>
+                        <a:t>0.861</a:t>
                       </a:r>
                     </a:p>
                   </a:txBody>
@@ -9760,58 +9794,7 @@
                 </a:solidFill>
                 <a:latin typeface="Calibri"/>
               </a:rPr>
-              <a:t>Across all 108 features: 3 pass for arousal, 0 for valence</a:t>
-            </a:r>
-          </a:p>
-          <a:p>
-            <a:pPr algn="l" marL="594360" indent="-274320">
-              <a:spcAft>
-                <a:spcPts val="600"/>
-              </a:spcAft>
-              <a:buChar char="–"/>
-            </a:pPr>
-            <a:r>
-              <a:rPr sz="1300" b="0">
-                <a:solidFill>
-                  <a:srgbClr val="1C1C1A"/>
-                </a:solidFill>
-                <a:latin typeface="Calibri"/>
-              </a:rPr>
-              <a:t>delta2_mfcc_13_std (ρ = +0.62)</a:t>
-            </a:r>
-          </a:p>
-          <a:p>
-            <a:pPr algn="l" marL="594360" indent="-274320">
-              <a:spcAft>
-                <a:spcPts val="600"/>
-              </a:spcAft>
-              <a:buChar char="–"/>
-            </a:pPr>
-            <a:r>
-              <a:rPr sz="1300" b="0">
-                <a:solidFill>
-                  <a:srgbClr val="1C1C1A"/>
-                </a:solidFill>
-                <a:latin typeface="Calibri"/>
-              </a:rPr>
-              <a:t>delta_mfcc_13_std (ρ = +0.60)</a:t>
-            </a:r>
-          </a:p>
-          <a:p>
-            <a:pPr algn="l" marL="594360" indent="-274320">
-              <a:spcAft>
-                <a:spcPts val="600"/>
-              </a:spcAft>
-              <a:buChar char="–"/>
-            </a:pPr>
-            <a:r>
-              <a:rPr sz="1300" b="0">
-                <a:solidFill>
-                  <a:srgbClr val="1C1C1A"/>
-                </a:solidFill>
-                <a:latin typeface="Calibri"/>
-              </a:rPr>
-              <a:t>mfcc_13_std (ρ = +0.59)</a:t>
+              <a:t>Across all 108 features: 0 pass for arousal, 0 for valence</a:t>
             </a:r>
           </a:p>
           <a:p>
@@ -9845,7 +9828,7 @@
                 </a:solidFill>
                 <a:latin typeface="Calibri"/>
               </a:rPr>
-              <a:t>With n = 32, only correlations of about |ρ| ≥ 0.49 can be detected reliably (80% power)</a:t>
+              <a:t>With n = 40, only correlations of about |ρ| ≥ 0.44 can be detected reliably (80% power)</a:t>
             </a:r>
           </a:p>
         </p:txBody>
@@ -10285,7 +10268,7 @@
                           </a:solidFill>
                           <a:latin typeface="Calibri"/>
                         </a:rPr>
-                        <a:t>0.42 [0.29, 0.56]</a:t>
+                        <a:t>0.48 [0.35, 0.62]</a:t>
                       </a:r>
                     </a:p>
                   </a:txBody>
@@ -10307,7 +10290,7 @@
                           </a:solidFill>
                           <a:latin typeface="Calibri"/>
                         </a:rPr>
-                        <a:t>0.29</a:t>
+                        <a:t>0.33</a:t>
                       </a:r>
                     </a:p>
                   </a:txBody>
@@ -10329,7 +10312,7 @@
                           </a:solidFill>
                           <a:latin typeface="Calibri"/>
                         </a:rPr>
-                        <a:t>0.146</a:t>
+                        <a:t>0.022</a:t>
                       </a:r>
                     </a:p>
                   </a:txBody>
@@ -10351,7 +10334,7 @@
                           </a:solidFill>
                           <a:latin typeface="Calibri"/>
                         </a:rPr>
-                        <a:t>0.729</a:t>
+                        <a:t>0.198</a:t>
                       </a:r>
                     </a:p>
                   </a:txBody>
@@ -10397,7 +10380,7 @@
                           </a:solidFill>
                           <a:latin typeface="Calibri"/>
                         </a:rPr>
-                        <a:t>Logistic regression</a:t>
+                        <a:t>Random forest</a:t>
                       </a:r>
                     </a:p>
                   </a:txBody>
@@ -10419,7 +10402,7 @@
                           </a:solidFill>
                           <a:latin typeface="Calibri"/>
                         </a:rPr>
-                        <a:t>0.60 [0.46, 0.75]</a:t>
+                        <a:t>0.59 [0.47, 0.71]</a:t>
                       </a:r>
                     </a:p>
                   </a:txBody>
@@ -10463,7 +10446,7 @@
                           </a:solidFill>
                           <a:latin typeface="Calibri"/>
                         </a:rPr>
-                        <a:t>0.253</a:t>
+                        <a:t>0.120</a:t>
                       </a:r>
                     </a:p>
                   </a:txBody>
@@ -10485,7 +10468,7 @@
                           </a:solidFill>
                           <a:latin typeface="Calibri"/>
                         </a:rPr>
-                        <a:t>1.000</a:t>
+                        <a:t>0.958</a:t>
                       </a:r>
                     </a:p>
                   </a:txBody>
@@ -10553,7 +10536,7 @@
                           </a:solidFill>
                           <a:latin typeface="Calibri"/>
                         </a:rPr>
-                        <a:t>0.64 [0.49, 0.79]</a:t>
+                        <a:t>0.56 [0.43, 0.69]</a:t>
                       </a:r>
                     </a:p>
                   </a:txBody>
@@ -10597,7 +10580,7 @@
                           </a:solidFill>
                           <a:latin typeface="Calibri"/>
                         </a:rPr>
-                        <a:t>0.032</a:t>
+                        <a:t>0.190</a:t>
                       </a:r>
                     </a:p>
                   </a:txBody>
@@ -10619,7 +10602,7 @@
                           </a:solidFill>
                           <a:latin typeface="Calibri"/>
                         </a:rPr>
-                        <a:t>0.240</a:t>
+                        <a:t>1.000</a:t>
                       </a:r>
                     </a:p>
                   </a:txBody>
@@ -10686,7 +10669,7 @@
                 </a:solidFill>
                 <a:latin typeface="Calibri"/>
               </a:rPr>
-              <a:t>3 of 9 raw p-values are below 0.05; about 0.45 would be expected by chance alone, so a few raw hits are not evidence</a:t>
+              <a:t>1 of 9 raw p-values are below 0.05; about 0.45 would be expected by chance alone, so a few raw hits are not evidence</a:t>
             </a:r>
           </a:p>
           <a:p>
@@ -11203,7 +11186,7 @@
                 </a:solidFill>
                 <a:latin typeface="Calibri"/>
               </a:rPr>
-              <a:t>The audio alone tells 'Kapoy' apart from the other words: balanced accuracy 0.75 (chance 0.50, permutation p = 0.022)</a:t>
+              <a:t>The audio alone tells 'Kapoy' apart from the other words: balanced accuracy 0.85 (chance 0.50, permutation p = 0.002)</a:t>
             </a:r>
           </a:p>
           <a:p>

--- a/reports/presentation/G3_results_presentation.pptx
+++ b/reports/presentation/G3_results_presentation.pptx
@@ -9811,23 +9811,6 @@
                 </a:solidFill>
                 <a:latin typeface="Calibri"/>
               </a:rPr>
-              <a:t>Those were not chosen in advance, and their meaning is unclear</a:t>
-            </a:r>
-          </a:p>
-          <a:p>
-            <a:pPr algn="l" marL="274320" indent="-274320">
-              <a:spcAft>
-                <a:spcPts val="600"/>
-              </a:spcAft>
-              <a:buChar char="•"/>
-            </a:pPr>
-            <a:r>
-              <a:rPr sz="1500" b="0">
-                <a:solidFill>
-                  <a:srgbClr val="1C1C1A"/>
-                </a:solidFill>
-                <a:latin typeface="Calibri"/>
-              </a:rPr>
               <a:t>With n = 40, only correlations of about |ρ| ≥ 0.44 can be detected reliably (80% power)</a:t>
             </a:r>
           </a:p>

--- a/reports/presentation/G3_results_presentation.pptx
+++ b/reports/presentation/G3_results_presentation.pptx
@@ -696,7 +696,7 @@
           <a:p/>
           <a:p>
             <a:r>
-              <a:t>The recordings are noisy: we detected background voices in 16 of 40, in a hallway right after class. And 5 files come from recordings made with a different audio setting, although that setting shows no significant difference here.</a:t>
+              <a:t>The recordings are noisy: we detected background voices in 16 of 40, in a hallway right after class. And 5 files come from recordings made with a different audio setting. Some features look different for those files, but with so few files the difference does not pass the correction. We also ran the models without them.</a:t>
             </a:r>
           </a:p>
           <a:p/>
@@ -5599,7 +5599,7 @@
                 </a:solidFill>
                 <a:latin typeface="Calibri"/>
               </a:rPr>
-              <a:t>Recording setting: 5 files come from recordings made with a different audio setting; no significant difference was found</a:t>
+              <a:t>Recording setting: 5 files come from recordings made with a different audio setting. 18 of 108 features differ before the correction and none after it (closest p = 0.053)</a:t>
             </a:r>
           </a:p>
           <a:p>

--- a/reports/presentation/G3_results_presentation.pptx
+++ b/reports/presentation/G3_results_presentation.pptx
@@ -860,7 +860,7 @@
           <a:lstStyle/>
           <a:p>
             <a:r>
-              <a:t>Our next steps are concrete. Complete the consent log from the signed forms. Have two group members listen to every clip without seeing the ratings. Find the original recordings for the files we could not check. Record more participants with one device, one setting and one take. Follow the analysis plan we wrote before seeing new data. And confirm the open protocol questions with our instructor.</a:t>
+              <a:t>Our next steps are concrete. First, run the analysis again with the completed sheet. Complete the consent log from the signed forms. Have two group members listen to every clip without seeing the ratings. Find the original recordings for the files we could not check. Record more participants with one device, one setting and one take. Follow the analysis plan we wrote before seeing new data. And confirm the open protocol questions with our instructor.</a:t>
             </a:r>
           </a:p>
           <a:p/>
@@ -1037,6 +1037,12 @@
           <a:p>
             <a:r>
               <a:t>9 spoken words are blank in the sheet. We never guessed a word from the feeling text; those files carry the label UNVERIFIED.</a:t>
+            </a:r>
+          </a:p>
+          <a:p/>
+          <a:p>
+            <a:r>
+              <a:t>One update. On 12 October the group completed the sheet: 9 blank words are now filled in by a group member who listened to each recording, and the ratings of 3 participants were corrected from the participants' answer forms, because the first sheet had typing mistakes. The results we show today use the earlier sheet. Running the analysis again with the completed sheet is our first next step.</a:t>
             </a:r>
           </a:p>
           <a:p/>
@@ -6161,6 +6167,23 @@
                 </a:solidFill>
                 <a:latin typeface="Calibri"/>
               </a:rPr>
+              <a:t>Run the analysis again with the completed sheet of 12 October: 9 words filled in, ratings of 3 participants corrected</a:t>
+            </a:r>
+          </a:p>
+          <a:p>
+            <a:pPr algn="l" marL="274320" indent="-274320">
+              <a:spcAft>
+                <a:spcPts val="600"/>
+              </a:spcAft>
+              <a:buChar char="•"/>
+            </a:pPr>
+            <a:r>
+              <a:rPr sz="2000" b="0">
+                <a:solidFill>
+                  <a:srgbClr val="1C1C1A"/>
+                </a:solidFill>
+                <a:latin typeface="Calibri"/>
+              </a:rPr>
               <a:t>Complete the consent log from the signed forms</a:t>
             </a:r>
           </a:p>
@@ -7784,6 +7807,23 @@
                 <a:latin typeface="Calibri"/>
               </a:rPr>
               <a:t>9 spoken words are blank in the sheet. We never guess a word from the feeling text</a:t>
+            </a:r>
+          </a:p>
+          <a:p>
+            <a:pPr algn="l" marL="594360" indent="-274320">
+              <a:spcAft>
+                <a:spcPts val="600"/>
+              </a:spcAft>
+              <a:buChar char="–"/>
+            </a:pPr>
+            <a:r>
+              <a:rPr sz="1500" b="0">
+                <a:solidFill>
+                  <a:srgbClr val="1C1C1A"/>
+                </a:solidFill>
+                <a:latin typeface="Calibri"/>
+              </a:rPr>
+              <a:t>Since then (12 October) the group completed the sheet: the words are filled in and the ratings of 3 participants are corrected. These slides use the earlier sheet</a:t>
             </a:r>
           </a:p>
           <a:p>

--- a/reports/presentation/G3_results_presentation.pptx
+++ b/reports/presentation/G3_results_presentation.pptx
@@ -596,19 +596,19 @@
           <a:p/>
           <a:p>
             <a:r>
-              <a:t>First test: can the computer tell Kapoy from the other words by sound alone? Yes. Balanced accuracy 0.85, with p = 0.002.</a:t>
+              <a:t>First test: can the computer tell Kapoy from the other words by sound alone? Only weakly. Balanced accuracy 0.69, with p = 0.072, which is not significant.</a:t>
             </a:r>
           </a:p>
           <a:p/>
           <a:p>
             <a:r>
-              <a:t>Second test: is the word linked to the feeling? Yes. Of 10 Kapoy speakers, 8 felt not pleasant. Of 21 speakers of other words, only 5 did.</a:t>
+              <a:t>Second test: is the word linked to the feeling? Yes. Of 15 Kapoy speakers, 13 felt not pleasant. Of 25 speakers of other words, 7 did.</a:t>
             </a:r>
           </a:p>
           <a:p/>
           <a:p>
             <a:r>
-              <a:t>So a model can score above chance by recognising Kapoy and answering not pleasant, without hearing any feeling at all.</a:t>
+              <a:t>So the word and the feeling go together. A model that picks up the word even partly could score above chance without hearing the feeling, and with this data we cannot separate the two.</a:t>
             </a:r>
           </a:p>
           <a:p/>
@@ -860,7 +860,7 @@
           <a:lstStyle/>
           <a:p>
             <a:r>
-              <a:t>Our next steps are concrete. First, run the analysis again with the completed sheet. Complete the consent log from the signed forms. Have two group members listen to every clip without seeing the ratings. Find the original recordings for the files we could not check. Record more participants with one device, one setting and one take. Follow the analysis plan we wrote before seeing new data. And confirm the open protocol questions with our instructor.</a:t>
+              <a:t>Our next steps are concrete. Complete the consent log from the signed forms. Have two group members listen to every clip without seeing the ratings. Find the original recordings for the files we could not check. Record more participants with one device, one setting and one take. Follow the analysis plan we wrote before seeing new data. And confirm the open protocol questions with our instructor.</a:t>
             </a:r>
           </a:p>
           <a:p/>
@@ -1036,13 +1036,13 @@
           <a:p/>
           <a:p>
             <a:r>
-              <a:t>9 spoken words are blank in the sheet. We never guessed a word from the feeling text; those files carry the label UNVERIFIED.</a:t>
+              <a:t>Every participant has a spoken word in the sheet. No word was guessed from the feeling text.</a:t>
             </a:r>
           </a:p>
           <a:p/>
           <a:p>
             <a:r>
-              <a:t>One update. On 12 October the group completed the sheet: 9 blank words are now filled in by a group member who listened to each recording, and the ratings of 3 participants were corrected from the participants' answer forms, because the first sheet had typing mistakes. The results we show today use the earlier sheet. Running the analysis again with the completed sheet is our first next step.</a:t>
+              <a:t>The group completed the sheet on 12 October: 9 blank words were filled in by a group member who listened to each recording, and the ratings of 3 participants were corrected from the participants' answer forms, because the first sheet had typing mistakes. The results we show use the completed sheet. The earlier sheet and its results are kept, so the two can be compared.</a:t>
             </a:r>
           </a:p>
           <a:p/>
@@ -1212,7 +1212,7 @@
           <a:lstStyle/>
           <a:p>
             <a:r>
-              <a:t>Most participants reported neutral to pleasant feelings and moderate to high energy. The two ratings rise together: the correlation is 0.71.</a:t>
+              <a:t>Most participants reported neutral to pleasant feelings and moderate to high energy. The two ratings rise together: the correlation is 0.72.</a:t>
             </a:r>
           </a:p>
           <a:p/>
@@ -1300,13 +1300,13 @@
           <a:p/>
           <a:p>
             <a:r>
-              <a:t>None of them is significantly linked to the ratings. The strongest are brightness (spectral centroid) with arousal at +0.26 and loudness (RMS) with valence at +0.26. Those are weak.</a:t>
+              <a:t>None of them is significantly linked to the ratings. The strongest are brightness (spectral centroid) with arousal at +0.35 and loudness (RMS) with valence at +0.37. Those are weak.</a:t>
             </a:r>
           </a:p>
           <a:p/>
           <a:p>
             <a:r>
-              <a:t>Across all 108 features, 0 pass the correction for testing many features at once for arousal, and 0 for valence.</a:t>
+              <a:t>Across all 108 features, 0 pass the correction for testing many features at once for arousal, and 1 for valence.</a:t>
             </a:r>
           </a:p>
           <a:p/>
@@ -1488,19 +1488,25 @@
           <a:p/>
           <a:p>
             <a:r>
-              <a:t>The random forest was best: 0.48 for three-level arousal (low, moderate, high), where chance is 0.33; 0.59 for valence (pleasant vs not pleasant), where chance is 0.50; 0.56 for two-level arousal (high vs not high), where chance is 0.50.</a:t>
+              <a:t>The random forest was best for every target: 0.41 for three-level arousal (low, moderate, high), where chance is 0.33; 0.70 for valence (pleasant vs not pleasant), where chance is 0.50; 0.55 for two-level arousal (high vs not high), where chance is 0.50.</a:t>
             </a:r>
           </a:p>
           <a:p/>
           <a:p>
             <a:r>
-              <a:t>Is that better than luck? We shuffled the ratings 500 times and ran the whole procedure again each time. 1 of 9 tests has a p-value below 0.05: the smallest is 0.022, for the random forest on three-level arousal (low, moderate, high).</a:t>
+              <a:t>Is that better than luck? We shuffled the ratings 500 times and ran the whole procedure again each time. 1 of 9 tests has a p-value below 0.05: the smallest is 0.006, for the random forest on valence (pleasant vs not pleasant).</a:t>
             </a:r>
           </a:p>
           <a:p/>
           <a:p>
             <a:r>
-              <a:t>But we ran 9 tests. With 9 tries, about 0.45 lucky results are expected. After the Holm correction that p-value becomes 0.198, which is not significant. So no model stays significant after the correction.</a:t>
+              <a:t>But we ran 9 tests. With 9 tries, about 0.45 lucky results are expected. After the Holm correction that p-value becomes 0.054, which is not significant. So no model stays significant after the correction.</a:t>
+            </a:r>
+          </a:p>
+          <a:p/>
+          <a:p>
+            <a:r>
+              <a:t>That is close to 0.05, and we say so. But the limit was fixed before we looked at the results, and this score rests on files we could not check: without them it is 0.63.</a:t>
             </a:r>
           </a:p>
         </p:txBody>
@@ -1582,7 +1588,7 @@
           <a:p/>
           <a:p>
             <a:r>
-              <a:t>The bars are wide. 8 of the 9 blue bars cross the chance line. The one that just clears it is the random forest for three-level arousal, and that is the result that did not survive the correction. This is what an inconclusive result looks like.</a:t>
+              <a:t>The bars are wide. 6 of the 9 blue bars cross the chance line. 3 bars clear it, but none of those results passes the correction. This is what an inconclusive result looks like.</a:t>
             </a:r>
           </a:p>
         </p:txBody>
@@ -4958,7 +4964,7 @@
                 </a:solidFill>
                 <a:latin typeface="Calibri"/>
               </a:rPr>
-              <a:t>The computer can tell “Kapoy” from the other words by sound alone: balanced accuracy 0.85 (chance 0.50, p = 0.002)</a:t>
+              <a:t>By sound alone the computer tells “Kapoy” from the other words only weakly: balanced accuracy 0.69 (chance 0.50, p = 0.072, not significant)</a:t>
             </a:r>
           </a:p>
           <a:p>
@@ -4975,7 +4981,7 @@
                 </a:solidFill>
                 <a:latin typeface="Calibri"/>
               </a:rPr>
-              <a:t>Not pleasant: 8 of 10 Kapoy speakers, against 5 of 21 speakers of other words (Fisher test, p = 0.006)</a:t>
+              <a:t>Not pleasant: 13 of 15 Kapoy speakers, against 7 of 25 speakers of other words (Fisher test, p = 0.001)</a:t>
             </a:r>
           </a:p>
           <a:p>
@@ -4992,7 +4998,7 @@
                 </a:solidFill>
                 <a:latin typeface="Calibri"/>
               </a:rPr>
-              <a:t>So a model can score above chance by recognising the word, without hearing any feeling</a:t>
+              <a:t>The word and the feeling go together, so a model that picks up the word even partly could score above chance. With this data we cannot separate the two</a:t>
             </a:r>
           </a:p>
           <a:p>
@@ -5179,7 +5185,7 @@
                           </a:solidFill>
                           <a:latin typeface="Calibri"/>
                         </a:rPr>
-                        <a:t>8</a:t>
+                        <a:t>13</a:t>
                       </a:r>
                     </a:p>
                   </a:txBody>
@@ -5247,7 +5253,7 @@
                           </a:solidFill>
                           <a:latin typeface="Calibri"/>
                         </a:rPr>
-                        <a:t>5</a:t>
+                        <a:t>7</a:t>
                       </a:r>
                     </a:p>
                   </a:txBody>
@@ -5269,7 +5275,7 @@
                           </a:solidFill>
                           <a:latin typeface="Calibri"/>
                         </a:rPr>
-                        <a:t>16</a:t>
+                        <a:t>18</a:t>
                       </a:r>
                     </a:p>
                   </a:txBody>
@@ -5951,6 +5957,23 @@
               <a:t>The sample is too small: a real study needs about 90 participants</a:t>
             </a:r>
           </a:p>
+          <a:p>
+            <a:pPr algn="l" marL="274320" indent="-274320">
+              <a:spcAft>
+                <a:spcPts val="600"/>
+              </a:spcAft>
+              <a:buChar char="•"/>
+            </a:pPr>
+            <a:r>
+              <a:rPr sz="2000" b="0">
+                <a:solidFill>
+                  <a:srgbClr val="1C1C1A"/>
+                </a:solidFill>
+                <a:latin typeface="Calibri"/>
+              </a:rPr>
+              <a:t>The closest result is valence in two groups: 0.70 against 0.50, p = 0.054 after correction. Without the 9 files we could not check, it is 0.63</a:t>
+            </a:r>
+          </a:p>
         </p:txBody>
       </p:sp>
     </p:spTree>
@@ -6167,23 +6190,6 @@
                 </a:solidFill>
                 <a:latin typeface="Calibri"/>
               </a:rPr>
-              <a:t>Run the analysis again with the completed sheet of 12 October: 9 words filled in, ratings of 3 participants corrected</a:t>
-            </a:r>
-          </a:p>
-          <a:p>
-            <a:pPr algn="l" marL="274320" indent="-274320">
-              <a:spcAft>
-                <a:spcPts val="600"/>
-              </a:spcAft>
-              <a:buChar char="•"/>
-            </a:pPr>
-            <a:r>
-              <a:rPr sz="2000" b="0">
-                <a:solidFill>
-                  <a:srgbClr val="1C1C1A"/>
-                </a:solidFill>
-                <a:latin typeface="Calibri"/>
-              </a:rPr>
               <a:t>Complete the consent log from the signed forms</a:t>
             </a:r>
           </a:p>
@@ -7806,7 +7812,7 @@
                 </a:solidFill>
                 <a:latin typeface="Calibri"/>
               </a:rPr>
-              <a:t>9 spoken words are blank in the sheet. We never guess a word from the feeling text</a:t>
+              <a:t>Every participant has a spoken word in the sheet. No word was guessed from the feeling text</a:t>
             </a:r>
           </a:p>
           <a:p>
@@ -7823,7 +7829,7 @@
                 </a:solidFill>
                 <a:latin typeface="Calibri"/>
               </a:rPr>
-              <a:t>Since then (12 October) the group completed the sheet: the words are filled in and the ratings of 3 participants are corrected. These slides use the earlier sheet</a:t>
+              <a:t>The group completed the sheet on 12 October: 9 blank words filled in and the ratings of 3 participants corrected. The earlier sheet and its results are kept</a:t>
             </a:r>
           </a:p>
           <a:p>
@@ -9476,7 +9482,7 @@
                 </a:solidFill>
                 <a:latin typeface="Calibri"/>
               </a:rPr>
-              <a:t>Pleasant feelings came with higher energy (Spearman correlation 0.71, n = 39)</a:t>
+              <a:t>Pleasant feelings came with higher energy (Spearman correlation 0.72, n = 40)</a:t>
             </a:r>
           </a:p>
         </p:txBody>
@@ -9843,7 +9849,7 @@
                 </a:solidFill>
                 <a:latin typeface="Calibri"/>
               </a:rPr>
-              <a:t>Simple voice measures show no clear link</a:t>
+              <a:t>Voice measures and the ratings</a:t>
             </a:r>
           </a:p>
         </p:txBody>
@@ -10181,7 +10187,7 @@
                           </a:solidFill>
                           <a:latin typeface="Calibri"/>
                         </a:rPr>
-                        <a:t>+0.01</a:t>
+                        <a:t>+0.08</a:t>
                       </a:r>
                     </a:p>
                   </a:txBody>
@@ -10203,7 +10209,7 @@
                           </a:solidFill>
                           <a:latin typeface="Calibri"/>
                         </a:rPr>
-                        <a:t>0.945</a:t>
+                        <a:t>0.621</a:t>
                       </a:r>
                     </a:p>
                   </a:txBody>
@@ -10225,7 +10231,7 @@
                           </a:solidFill>
                           <a:latin typeface="Calibri"/>
                         </a:rPr>
-                        <a:t>+0.01</a:t>
+                        <a:t>+0.16</a:t>
                       </a:r>
                     </a:p>
                   </a:txBody>
@@ -10247,7 +10253,7 @@
                           </a:solidFill>
                           <a:latin typeface="Calibri"/>
                         </a:rPr>
-                        <a:t>0.972</a:t>
+                        <a:t>0.333</a:t>
                       </a:r>
                     </a:p>
                   </a:txBody>
@@ -10293,7 +10299,7 @@
                           </a:solidFill>
                           <a:latin typeface="Calibri"/>
                         </a:rPr>
-                        <a:t>+0.21</a:t>
+                        <a:t>+0.12</a:t>
                       </a:r>
                     </a:p>
                   </a:txBody>
@@ -10315,7 +10321,7 @@
                           </a:solidFill>
                           <a:latin typeface="Calibri"/>
                         </a:rPr>
-                        <a:t>0.198</a:t>
+                        <a:t>0.466</a:t>
                       </a:r>
                     </a:p>
                   </a:txBody>
@@ -10337,7 +10343,7 @@
                           </a:solidFill>
                           <a:latin typeface="Calibri"/>
                         </a:rPr>
-                        <a:t>+0.08</a:t>
+                        <a:t>+0.03</a:t>
                       </a:r>
                     </a:p>
                   </a:txBody>
@@ -10359,7 +10365,7 @@
                           </a:solidFill>
                           <a:latin typeface="Calibri"/>
                         </a:rPr>
-                        <a:t>0.617</a:t>
+                        <a:t>0.849</a:t>
                       </a:r>
                     </a:p>
                   </a:txBody>
@@ -10405,7 +10411,7 @@
                           </a:solidFill>
                           <a:latin typeface="Calibri"/>
                         </a:rPr>
-                        <a:t>+0.19</a:t>
+                        <a:t>+0.25</a:t>
                       </a:r>
                     </a:p>
                   </a:txBody>
@@ -10427,7 +10433,7 @@
                           </a:solidFill>
                           <a:latin typeface="Calibri"/>
                         </a:rPr>
-                        <a:t>0.237</a:t>
+                        <a:t>0.120</a:t>
                       </a:r>
                     </a:p>
                   </a:txBody>
@@ -10449,7 +10455,7 @@
                           </a:solidFill>
                           <a:latin typeface="Calibri"/>
                         </a:rPr>
-                        <a:t>+0.26</a:t>
+                        <a:t>+0.37</a:t>
                       </a:r>
                     </a:p>
                   </a:txBody>
@@ -10471,7 +10477,7 @@
                           </a:solidFill>
                           <a:latin typeface="Calibri"/>
                         </a:rPr>
-                        <a:t>0.105</a:t>
+                        <a:t>0.017</a:t>
                       </a:r>
                     </a:p>
                   </a:txBody>
@@ -10496,6 +10502,274 @@
                           <a:latin typeface="Calibri"/>
                         </a:rPr>
                         <a:t>Word duration</a:t>
+                      </a:r>
+                    </a:p>
+                  </a:txBody>
+                  <a:tcPr>
+                    <a:solidFill>
+                      <a:srgbClr val="F1F4FA"/>
+                    </a:solidFill>
+                  </a:tcPr>
+                </a:tc>
+                <a:tc>
+                  <a:txBody>
+                    <a:bodyPr/>
+                    <a:lstStyle/>
+                    <a:p>
+                      <a:r>
+                        <a:rPr sz="1400">
+                          <a:solidFill>
+                            <a:srgbClr val="1C1C1A"/>
+                          </a:solidFill>
+                          <a:latin typeface="Calibri"/>
+                        </a:rPr>
+                        <a:t>+0.15</a:t>
+                      </a:r>
+                    </a:p>
+                  </a:txBody>
+                  <a:tcPr>
+                    <a:solidFill>
+                      <a:srgbClr val="F1F4FA"/>
+                    </a:solidFill>
+                  </a:tcPr>
+                </a:tc>
+                <a:tc>
+                  <a:txBody>
+                    <a:bodyPr/>
+                    <a:lstStyle/>
+                    <a:p>
+                      <a:r>
+                        <a:rPr sz="1400">
+                          <a:solidFill>
+                            <a:srgbClr val="1C1C1A"/>
+                          </a:solidFill>
+                          <a:latin typeface="Calibri"/>
+                        </a:rPr>
+                        <a:t>0.356</a:t>
+                      </a:r>
+                    </a:p>
+                  </a:txBody>
+                  <a:tcPr>
+                    <a:solidFill>
+                      <a:srgbClr val="F1F4FA"/>
+                    </a:solidFill>
+                  </a:tcPr>
+                </a:tc>
+                <a:tc>
+                  <a:txBody>
+                    <a:bodyPr/>
+                    <a:lstStyle/>
+                    <a:p>
+                      <a:r>
+                        <a:rPr sz="1400">
+                          <a:solidFill>
+                            <a:srgbClr val="1C1C1A"/>
+                          </a:solidFill>
+                          <a:latin typeface="Calibri"/>
+                        </a:rPr>
+                        <a:t>+0.03</a:t>
+                      </a:r>
+                    </a:p>
+                  </a:txBody>
+                  <a:tcPr>
+                    <a:solidFill>
+                      <a:srgbClr val="F1F4FA"/>
+                    </a:solidFill>
+                  </a:tcPr>
+                </a:tc>
+                <a:tc>
+                  <a:txBody>
+                    <a:bodyPr/>
+                    <a:lstStyle/>
+                    <a:p>
+                      <a:r>
+                        <a:rPr sz="1400">
+                          <a:solidFill>
+                            <a:srgbClr val="1C1C1A"/>
+                          </a:solidFill>
+                          <a:latin typeface="Calibri"/>
+                        </a:rPr>
+                        <a:t>0.843</a:t>
+                      </a:r>
+                    </a:p>
+                  </a:txBody>
+                  <a:tcPr>
+                    <a:solidFill>
+                      <a:srgbClr val="F1F4FA"/>
+                    </a:solidFill>
+                  </a:tcPr>
+                </a:tc>
+              </a:tr>
+              <a:tr h="384048">
+                <a:tc>
+                  <a:txBody>
+                    <a:bodyPr/>
+                    <a:lstStyle/>
+                    <a:p>
+                      <a:r>
+                        <a:rPr sz="1400">
+                          <a:solidFill>
+                            <a:srgbClr val="1C1C1A"/>
+                          </a:solidFill>
+                          <a:latin typeface="Calibri"/>
+                        </a:rPr>
+                        <a:t>Brightness of the sound</a:t>
+                      </a:r>
+                    </a:p>
+                  </a:txBody>
+                  <a:tcPr>
+                    <a:solidFill>
+                      <a:srgbClr val="FFFFFF"/>
+                    </a:solidFill>
+                  </a:tcPr>
+                </a:tc>
+                <a:tc>
+                  <a:txBody>
+                    <a:bodyPr/>
+                    <a:lstStyle/>
+                    <a:p>
+                      <a:r>
+                        <a:rPr sz="1400">
+                          <a:solidFill>
+                            <a:srgbClr val="1C1C1A"/>
+                          </a:solidFill>
+                          <a:latin typeface="Calibri"/>
+                        </a:rPr>
+                        <a:t>+0.35</a:t>
+                      </a:r>
+                    </a:p>
+                  </a:txBody>
+                  <a:tcPr>
+                    <a:solidFill>
+                      <a:srgbClr val="FFFFFF"/>
+                    </a:solidFill>
+                  </a:tcPr>
+                </a:tc>
+                <a:tc>
+                  <a:txBody>
+                    <a:bodyPr/>
+                    <a:lstStyle/>
+                    <a:p>
+                      <a:r>
+                        <a:rPr sz="1400">
+                          <a:solidFill>
+                            <a:srgbClr val="1C1C1A"/>
+                          </a:solidFill>
+                          <a:latin typeface="Calibri"/>
+                        </a:rPr>
+                        <a:t>0.027</a:t>
+                      </a:r>
+                    </a:p>
+                  </a:txBody>
+                  <a:tcPr>
+                    <a:solidFill>
+                      <a:srgbClr val="FFFFFF"/>
+                    </a:solidFill>
+                  </a:tcPr>
+                </a:tc>
+                <a:tc>
+                  <a:txBody>
+                    <a:bodyPr/>
+                    <a:lstStyle/>
+                    <a:p>
+                      <a:r>
+                        <a:rPr sz="1400">
+                          <a:solidFill>
+                            <a:srgbClr val="1C1C1A"/>
+                          </a:solidFill>
+                          <a:latin typeface="Calibri"/>
+                        </a:rPr>
+                        <a:t>+0.27</a:t>
+                      </a:r>
+                    </a:p>
+                  </a:txBody>
+                  <a:tcPr>
+                    <a:solidFill>
+                      <a:srgbClr val="FFFFFF"/>
+                    </a:solidFill>
+                  </a:tcPr>
+                </a:tc>
+                <a:tc>
+                  <a:txBody>
+                    <a:bodyPr/>
+                    <a:lstStyle/>
+                    <a:p>
+                      <a:r>
+                        <a:rPr sz="1400">
+                          <a:solidFill>
+                            <a:srgbClr val="1C1C1A"/>
+                          </a:solidFill>
+                          <a:latin typeface="Calibri"/>
+                        </a:rPr>
+                        <a:t>0.094</a:t>
+                      </a:r>
+                    </a:p>
+                  </a:txBody>
+                  <a:tcPr>
+                    <a:solidFill>
+                      <a:srgbClr val="FFFFFF"/>
+                    </a:solidFill>
+                  </a:tcPr>
+                </a:tc>
+              </a:tr>
+              <a:tr h="384048">
+                <a:tc>
+                  <a:txBody>
+                    <a:bodyPr/>
+                    <a:lstStyle/>
+                    <a:p>
+                      <a:r>
+                        <a:rPr sz="1400">
+                          <a:solidFill>
+                            <a:srgbClr val="1C1C1A"/>
+                          </a:solidFill>
+                          <a:latin typeface="Calibri"/>
+                        </a:rPr>
+                        <a:t>Share of voiced sound</a:t>
+                      </a:r>
+                    </a:p>
+                  </a:txBody>
+                  <a:tcPr>
+                    <a:solidFill>
+                      <a:srgbClr val="F1F4FA"/>
+                    </a:solidFill>
+                  </a:tcPr>
+                </a:tc>
+                <a:tc>
+                  <a:txBody>
+                    <a:bodyPr/>
+                    <a:lstStyle/>
+                    <a:p>
+                      <a:r>
+                        <a:rPr sz="1400">
+                          <a:solidFill>
+                            <a:srgbClr val="1C1C1A"/>
+                          </a:solidFill>
+                          <a:latin typeface="Calibri"/>
+                        </a:rPr>
+                        <a:t>+0.02</a:t>
+                      </a:r>
+                    </a:p>
+                  </a:txBody>
+                  <a:tcPr>
+                    <a:solidFill>
+                      <a:srgbClr val="F1F4FA"/>
+                    </a:solidFill>
+                  </a:tcPr>
+                </a:tc>
+                <a:tc>
+                  <a:txBody>
+                    <a:bodyPr/>
+                    <a:lstStyle/>
+                    <a:p>
+                      <a:r>
+                        <a:rPr sz="1400">
+                          <a:solidFill>
+                            <a:srgbClr val="1C1C1A"/>
+                          </a:solidFill>
+                          <a:latin typeface="Calibri"/>
+                        </a:rPr>
+                        <a:t>0.911</a:t>
                       </a:r>
                     </a:p>
                   </a:txBody>
@@ -10549,274 +10823,6 @@
                     </a:solidFill>
                   </a:tcPr>
                 </a:tc>
-                <a:tc>
-                  <a:txBody>
-                    <a:bodyPr/>
-                    <a:lstStyle/>
-                    <a:p>
-                      <a:r>
-                        <a:rPr sz="1400">
-                          <a:solidFill>
-                            <a:srgbClr val="1C1C1A"/>
-                          </a:solidFill>
-                          <a:latin typeface="Calibri"/>
-                        </a:rPr>
-                        <a:t>+0.10</a:t>
-                      </a:r>
-                    </a:p>
-                  </a:txBody>
-                  <a:tcPr>
-                    <a:solidFill>
-                      <a:srgbClr val="F1F4FA"/>
-                    </a:solidFill>
-                  </a:tcPr>
-                </a:tc>
-                <a:tc>
-                  <a:txBody>
-                    <a:bodyPr/>
-                    <a:lstStyle/>
-                    <a:p>
-                      <a:r>
-                        <a:rPr sz="1400">
-                          <a:solidFill>
-                            <a:srgbClr val="1C1C1A"/>
-                          </a:solidFill>
-                          <a:latin typeface="Calibri"/>
-                        </a:rPr>
-                        <a:t>0.523</a:t>
-                      </a:r>
-                    </a:p>
-                  </a:txBody>
-                  <a:tcPr>
-                    <a:solidFill>
-                      <a:srgbClr val="F1F4FA"/>
-                    </a:solidFill>
-                  </a:tcPr>
-                </a:tc>
-              </a:tr>
-              <a:tr h="384048">
-                <a:tc>
-                  <a:txBody>
-                    <a:bodyPr/>
-                    <a:lstStyle/>
-                    <a:p>
-                      <a:r>
-                        <a:rPr sz="1400">
-                          <a:solidFill>
-                            <a:srgbClr val="1C1C1A"/>
-                          </a:solidFill>
-                          <a:latin typeface="Calibri"/>
-                        </a:rPr>
-                        <a:t>Brightness of the sound</a:t>
-                      </a:r>
-                    </a:p>
-                  </a:txBody>
-                  <a:tcPr>
-                    <a:solidFill>
-                      <a:srgbClr val="FFFFFF"/>
-                    </a:solidFill>
-                  </a:tcPr>
-                </a:tc>
-                <a:tc>
-                  <a:txBody>
-                    <a:bodyPr/>
-                    <a:lstStyle/>
-                    <a:p>
-                      <a:r>
-                        <a:rPr sz="1400">
-                          <a:solidFill>
-                            <a:srgbClr val="1C1C1A"/>
-                          </a:solidFill>
-                          <a:latin typeface="Calibri"/>
-                        </a:rPr>
-                        <a:t>+0.26</a:t>
-                      </a:r>
-                    </a:p>
-                  </a:txBody>
-                  <a:tcPr>
-                    <a:solidFill>
-                      <a:srgbClr val="FFFFFF"/>
-                    </a:solidFill>
-                  </a:tcPr>
-                </a:tc>
-                <a:tc>
-                  <a:txBody>
-                    <a:bodyPr/>
-                    <a:lstStyle/>
-                    <a:p>
-                      <a:r>
-                        <a:rPr sz="1400">
-                          <a:solidFill>
-                            <a:srgbClr val="1C1C1A"/>
-                          </a:solidFill>
-                          <a:latin typeface="Calibri"/>
-                        </a:rPr>
-                        <a:t>0.115</a:t>
-                      </a:r>
-                    </a:p>
-                  </a:txBody>
-                  <a:tcPr>
-                    <a:solidFill>
-                      <a:srgbClr val="FFFFFF"/>
-                    </a:solidFill>
-                  </a:tcPr>
-                </a:tc>
-                <a:tc>
-                  <a:txBody>
-                    <a:bodyPr/>
-                    <a:lstStyle/>
-                    <a:p>
-                      <a:r>
-                        <a:rPr sz="1400">
-                          <a:solidFill>
-                            <a:srgbClr val="1C1C1A"/>
-                          </a:solidFill>
-                          <a:latin typeface="Calibri"/>
-                        </a:rPr>
-                        <a:t>+0.14</a:t>
-                      </a:r>
-                    </a:p>
-                  </a:txBody>
-                  <a:tcPr>
-                    <a:solidFill>
-                      <a:srgbClr val="FFFFFF"/>
-                    </a:solidFill>
-                  </a:tcPr>
-                </a:tc>
-                <a:tc>
-                  <a:txBody>
-                    <a:bodyPr/>
-                    <a:lstStyle/>
-                    <a:p>
-                      <a:r>
-                        <a:rPr sz="1400">
-                          <a:solidFill>
-                            <a:srgbClr val="1C1C1A"/>
-                          </a:solidFill>
-                          <a:latin typeface="Calibri"/>
-                        </a:rPr>
-                        <a:t>0.391</a:t>
-                      </a:r>
-                    </a:p>
-                  </a:txBody>
-                  <a:tcPr>
-                    <a:solidFill>
-                      <a:srgbClr val="FFFFFF"/>
-                    </a:solidFill>
-                  </a:tcPr>
-                </a:tc>
-              </a:tr>
-              <a:tr h="384048">
-                <a:tc>
-                  <a:txBody>
-                    <a:bodyPr/>
-                    <a:lstStyle/>
-                    <a:p>
-                      <a:r>
-                        <a:rPr sz="1400">
-                          <a:solidFill>
-                            <a:srgbClr val="1C1C1A"/>
-                          </a:solidFill>
-                          <a:latin typeface="Calibri"/>
-                        </a:rPr>
-                        <a:t>Share of voiced sound</a:t>
-                      </a:r>
-                    </a:p>
-                  </a:txBody>
-                  <a:tcPr>
-                    <a:solidFill>
-                      <a:srgbClr val="F1F4FA"/>
-                    </a:solidFill>
-                  </a:tcPr>
-                </a:tc>
-                <a:tc>
-                  <a:txBody>
-                    <a:bodyPr/>
-                    <a:lstStyle/>
-                    <a:p>
-                      <a:r>
-                        <a:rPr sz="1400">
-                          <a:solidFill>
-                            <a:srgbClr val="1C1C1A"/>
-                          </a:solidFill>
-                          <a:latin typeface="Calibri"/>
-                        </a:rPr>
-                        <a:t>−0.03</a:t>
-                      </a:r>
-                    </a:p>
-                  </a:txBody>
-                  <a:tcPr>
-                    <a:solidFill>
-                      <a:srgbClr val="F1F4FA"/>
-                    </a:solidFill>
-                  </a:tcPr>
-                </a:tc>
-                <a:tc>
-                  <a:txBody>
-                    <a:bodyPr/>
-                    <a:lstStyle/>
-                    <a:p>
-                      <a:r>
-                        <a:rPr sz="1400">
-                          <a:solidFill>
-                            <a:srgbClr val="1C1C1A"/>
-                          </a:solidFill>
-                          <a:latin typeface="Calibri"/>
-                        </a:rPr>
-                        <a:t>0.859</a:t>
-                      </a:r>
-                    </a:p>
-                  </a:txBody>
-                  <a:tcPr>
-                    <a:solidFill>
-                      <a:srgbClr val="F1F4FA"/>
-                    </a:solidFill>
-                  </a:tcPr>
-                </a:tc>
-                <a:tc>
-                  <a:txBody>
-                    <a:bodyPr/>
-                    <a:lstStyle/>
-                    <a:p>
-                      <a:r>
-                        <a:rPr sz="1400">
-                          <a:solidFill>
-                            <a:srgbClr val="1C1C1A"/>
-                          </a:solidFill>
-                          <a:latin typeface="Calibri"/>
-                        </a:rPr>
-                        <a:t>+0.03</a:t>
-                      </a:r>
-                    </a:p>
-                  </a:txBody>
-                  <a:tcPr>
-                    <a:solidFill>
-                      <a:srgbClr val="F1F4FA"/>
-                    </a:solidFill>
-                  </a:tcPr>
-                </a:tc>
-                <a:tc>
-                  <a:txBody>
-                    <a:bodyPr/>
-                    <a:lstStyle/>
-                    <a:p>
-                      <a:r>
-                        <a:rPr sz="1400">
-                          <a:solidFill>
-                            <a:srgbClr val="1C1C1A"/>
-                          </a:solidFill>
-                          <a:latin typeface="Calibri"/>
-                        </a:rPr>
-                        <a:t>0.861</a:t>
-                      </a:r>
-                    </a:p>
-                  </a:txBody>
-                  <a:tcPr>
-                    <a:solidFill>
-                      <a:srgbClr val="F1F4FA"/>
-                    </a:solidFill>
-                  </a:tcPr>
-                </a:tc>
               </a:tr>
             </a:tbl>
           </a:graphicData>
@@ -10874,7 +10880,7 @@
                 </a:solidFill>
                 <a:latin typeface="Calibri"/>
               </a:rPr>
-              <a:t>The strongest link among the six is +0.26, which is weak</a:t>
+              <a:t>The strongest link among the six is +0.37</a:t>
             </a:r>
           </a:p>
           <a:p>
@@ -10908,7 +10914,41 @@
                 </a:solidFill>
                 <a:latin typeface="Calibri"/>
               </a:rPr>
-              <a:t>All 108 features: 0 significant for arousal, 0 for valence</a:t>
+              <a:t>All 108 features: 0 significant for arousal, 1 for valence</a:t>
+            </a:r>
+          </a:p>
+          <a:p>
+            <a:pPr algn="l" marL="594360" indent="-274320">
+              <a:spcAft>
+                <a:spcPts val="600"/>
+              </a:spcAft>
+              <a:buChar char="–"/>
+            </a:pPr>
+            <a:r>
+              <a:rPr sz="1300" b="0">
+                <a:solidFill>
+                  <a:srgbClr val="1C1C1A"/>
+                </a:solidFill>
+                <a:latin typeface="Calibri"/>
+              </a:rPr>
+              <a:t>rms_db_iqr (ρ = −0.54)</a:t>
+            </a:r>
+          </a:p>
+          <a:p>
+            <a:pPr algn="l" marL="274320" indent="-274320">
+              <a:spcAft>
+                <a:spcPts val="600"/>
+              </a:spcAft>
+              <a:buChar char="•"/>
+            </a:pPr>
+            <a:r>
+              <a:rPr sz="1500" b="0">
+                <a:solidFill>
+                  <a:srgbClr val="1C1C1A"/>
+                </a:solidFill>
+                <a:latin typeface="Calibri"/>
+              </a:rPr>
+              <a:t>Those were not chosen in advance, and their meaning is unclear</a:t>
             </a:r>
           </a:p>
           <a:p>
@@ -11635,7 +11675,7 @@
                 </a:solidFill>
                 <a:latin typeface="Calibri"/>
               </a:rPr>
-              <a:t>The models did not beat chance</a:t>
+              <a:t>No model beats chance after correction</a:t>
             </a:r>
           </a:p>
         </p:txBody>
@@ -12018,7 +12058,7 @@
                           </a:solidFill>
                           <a:latin typeface="Calibri"/>
                         </a:rPr>
-                        <a:t>0.48 [0.35, 0.62]</a:t>
+                        <a:t>0.41 [0.29, 0.54]</a:t>
                       </a:r>
                     </a:p>
                   </a:txBody>
@@ -12062,7 +12102,7 @@
                           </a:solidFill>
                           <a:latin typeface="Calibri"/>
                         </a:rPr>
-                        <a:t>0.022</a:t>
+                        <a:t>0.134</a:t>
                       </a:r>
                     </a:p>
                   </a:txBody>
@@ -12084,7 +12124,7 @@
                           </a:solidFill>
                           <a:latin typeface="Calibri"/>
                         </a:rPr>
-                        <a:t>0.198</a:t>
+                        <a:t>0.802</a:t>
                       </a:r>
                     </a:p>
                   </a:txBody>
@@ -12152,7 +12192,7 @@
                           </a:solidFill>
                           <a:latin typeface="Calibri"/>
                         </a:rPr>
-                        <a:t>0.59 [0.47, 0.71]</a:t>
+                        <a:t>0.70 [0.58, 0.82]</a:t>
                       </a:r>
                     </a:p>
                   </a:txBody>
@@ -12196,7 +12236,7 @@
                           </a:solidFill>
                           <a:latin typeface="Calibri"/>
                         </a:rPr>
-                        <a:t>0.120</a:t>
+                        <a:t>0.006</a:t>
                       </a:r>
                     </a:p>
                   </a:txBody>
@@ -12218,7 +12258,7 @@
                           </a:solidFill>
                           <a:latin typeface="Calibri"/>
                         </a:rPr>
-                        <a:t>0.958</a:t>
+                        <a:t>0.054</a:t>
                       </a:r>
                     </a:p>
                   </a:txBody>
@@ -12286,7 +12326,7 @@
                           </a:solidFill>
                           <a:latin typeface="Calibri"/>
                         </a:rPr>
-                        <a:t>0.56 [0.43, 0.69]</a:t>
+                        <a:t>0.55 [0.43, 0.68]</a:t>
                       </a:r>
                     </a:p>
                   </a:txBody>
@@ -12330,7 +12370,7 @@
                           </a:solidFill>
                           <a:latin typeface="Calibri"/>
                         </a:rPr>
-                        <a:t>0.190</a:t>
+                        <a:t>0.271</a:t>
                       </a:r>
                     </a:p>
                   </a:txBody>
@@ -12436,7 +12476,7 @@
                 </a:solidFill>
                 <a:latin typeface="Calibri"/>
               </a:rPr>
-              <a:t>The intervals are wide: 8 of the 9 model intervals include the chance level</a:t>
+              <a:t>The intervals are wide: 6 of the 9 model intervals include the chance level</a:t>
             </a:r>
           </a:p>
         </p:txBody>
@@ -12752,7 +12792,7 @@
                 </a:solidFill>
                 <a:latin typeface="Calibri"/>
               </a:rPr>
-              <a:t>8 of the 9 blue bars cross the chance line</a:t>
+              <a:t>6 of the 9 blue bars cross the chance line</a:t>
             </a:r>
           </a:p>
         </p:txBody>
